--- a/selfcafe-partner-deck/selfcafe-partner-deck.pptx
+++ b/selfcafe-partner-deck/selfcafe-partner-deck.pptx
@@ -5180,7 +5180,7 @@
                 <a:ea typeface="Yu Gothic" pitchFamily="34" charset="-122"/>
                 <a:cs typeface="Yu Gothic" pitchFamily="34" charset="-120"/>
               </a:rPr>
-              <a:t>開業資金（居抜き20坪想定）</a:t>
+              <a:t>初期費用（居抜き・20坪想定）</a:t>
             </a:r>
             <a:endParaRPr lang="en-US" sz="950" dirty="0"/>
           </a:p>
@@ -13588,7 +13588,7 @@
                 <a:ea typeface="Yu Gothic" pitchFamily="34" charset="-122"/>
                 <a:cs typeface="Yu Gothic" pitchFamily="34" charset="-120"/>
               </a:rPr>
-              <a:t>他社カフェ業態と比較し、1/10以下のコストで出店が可能。開業資金650万円〜から始められます。</a:t>
+              <a:t>他社カフェ業態と比較し、1/10以下のコストで出店が可能。初期費用650万円〜から始められます。</a:t>
             </a:r>
             <a:endParaRPr lang="en-US" sz="1050" dirty="0"/>
           </a:p>
@@ -13654,7 +13654,7 @@
                 <a:ea typeface="Yu Gothic" pitchFamily="34" charset="-122"/>
                 <a:cs typeface="Yu Gothic" pitchFamily="34" charset="-120"/>
               </a:rPr>
-              <a:t>加盟金 200万円</a:t>
+              <a:t>加盟金 100万円</a:t>
             </a:r>
             <a:endParaRPr lang="en-US" sz="850" dirty="0"/>
           </a:p>
@@ -13720,7 +13720,7 @@
                 <a:ea typeface="Yu Gothic" pitchFamily="34" charset="-122"/>
                 <a:cs typeface="Yu Gothic" pitchFamily="34" charset="-120"/>
               </a:rPr>
-              <a:t>開業資金 650万円〜</a:t>
+              <a:t>初期費用 650万円〜</a:t>
             </a:r>
             <a:endParaRPr lang="en-US" sz="850" dirty="0"/>
           </a:p>
@@ -15250,7 +15250,7 @@
                           <a:ea typeface="Arial" pitchFamily="34" charset="-122"/>
                           <a:cs typeface="Arial" pitchFamily="34" charset="-120"/>
                         </a:rPr>
-                        <a:t>200万円</a:t>
+                        <a:t>100万円</a:t>
                       </a:r>
                       <a:endParaRPr lang="en-US" sz="1100" dirty="0">
                         <a:latin typeface="Arial" charset="0"/>
@@ -16346,7 +16346,7 @@
                           <a:ea typeface="Arial" pitchFamily="34" charset="-122"/>
                           <a:cs typeface="Arial" pitchFamily="34" charset="-120"/>
                         </a:rPr>
-                        <a:t>650万円〜</a:t>
+                        <a:t>550万円〜</a:t>
                       </a:r>
                       <a:endParaRPr lang="en-US" sz="1300" dirty="0">
                         <a:latin typeface="Arial" charset="0"/>
@@ -16881,7 +16881,7 @@
                 <a:ea typeface="Yu Gothic" pitchFamily="34" charset="-122"/>
                 <a:cs typeface="Yu Gothic" pitchFamily="34" charset="-120"/>
               </a:rPr>
-              <a:t>1/5 〜 1/13</a:t>
+              <a:t>1/5 〜 1/15</a:t>
             </a:r>
             <a:pPr indent="0" marL="0">
               <a:buNone/>
@@ -17347,7 +17347,7 @@
                 <a:ea typeface="Arial" pitchFamily="34" charset="-122"/>
                 <a:cs typeface="Arial" pitchFamily="34" charset="-120"/>
               </a:rPr>
-              <a:t>750万円〜</a:t>
+              <a:t>650万円〜</a:t>
             </a:r>
             <a:endParaRPr lang="en-US" sz="3000" dirty="0"/>
           </a:p>
@@ -17533,7 +17533,7 @@
                 <a:ea typeface="Arial" pitchFamily="34" charset="-122"/>
                 <a:cs typeface="Arial" pitchFamily="34" charset="-120"/>
               </a:rPr>
-              <a:t>1,050万円〜</a:t>
+              <a:t>950万円〜</a:t>
             </a:r>
             <a:endParaRPr lang="en-US" sz="3000" dirty="0"/>
           </a:p>
@@ -17694,7 +17694,7 @@
                 <a:ea typeface="Arial" pitchFamily="34" charset="-122"/>
                 <a:cs typeface="Arial" pitchFamily="34" charset="-120"/>
               </a:rPr>
-              <a:t>750万円〜</a:t>
+              <a:t>650万円〜</a:t>
             </a:r>
             <a:endParaRPr lang="en-US" sz="1000" dirty="0"/>
           </a:p>
@@ -17823,7 +17823,7 @@
                 <a:ea typeface="Arial" pitchFamily="34" charset="-122"/>
                 <a:cs typeface="Arial" pitchFamily="34" charset="-120"/>
               </a:rPr>
-              <a:t>200万円</a:t>
+              <a:t>100万円</a:t>
             </a:r>
             <a:endParaRPr lang="en-US" sz="1700" dirty="0"/>
           </a:p>
@@ -37241,7 +37241,7 @@
                 <a:ea typeface="Yu Gothic" pitchFamily="34" charset="-122"/>
                 <a:cs typeface="Yu Gothic" pitchFamily="34" charset="-120"/>
               </a:rPr>
-              <a:t>開業資金（居抜き・20坪想定）</a:t>
+              <a:t>初期費用（居抜き・20坪想定）</a:t>
             </a:r>
             <a:endParaRPr lang="en-US" sz="900" dirty="0"/>
           </a:p>
